--- a/outputs/presentation/internal-interview-quotes.pptx
+++ b/outputs/presentation/internal-interview-quotes.pptx
@@ -521,6 +521,27 @@
           <a:p>
             <a:r>
               <a:t>인용문은 dashboard/src/data/interviews.js 의 keyQuotes 원문이며 em-dash만 마침표·쉼표로 치환했다. 수치(4~5개, 60~70%)는 발언자 표현 그대로.</a:t>
+            </a:r>
+          </a:p>
+          <a:p/>
+          <a:p>
+            <a:r>
+              <a:t>각 발언의 과제 반영(장표에서는 제외, 구두 설명용):</a:t>
+            </a:r>
+          </a:p>
+          <a:p>
+            <a:r>
+              <a:t>- 1. 최장석 상무 (다운사이드의 실체): "수요 감소"를 가속기 → HBM → DDR의 제품 단위 인과로 정의. 쇼티지가 오버서플라이로 반전되는 지점이 과제의 문제 정의다.</a:t>
+            </a:r>
+          </a:p>
+          <a:p>
+            <a:r>
+              <a:t>- 2. 이창수 부사장 (1차 저지선과 과제의 자리): 계약(LTA·take-or-pay)이 다운턴 물량의 바닥을 만드는 1차 저지선. 계약이 뚫리는 극한 국면을 대비하는 2차 저지선이 이 과제의 정체성이다.</a:t>
+            </a:r>
+          </a:p>
+          <a:p>
+            <a:r>
+              <a:t>- 3. 송용호 부사장 (2차 저지선의 기본): 고객은 재고 대신 반품으로 대응한다. 새로운 것(전환 TAT·라인 일체화·본딩)에 앞서 품질·원가라는 기본을 2차 저지선의 별도 축으로 세운다.</a:t>
             </a:r>
           </a:p>
           <a:p/>
@@ -3540,8 +3561,8 @@
         </p:nvSpPr>
         <p:spPr>
           <a:xfrm>
-            <a:off x="548640" y="411480"/>
-            <a:ext cx="9631375" cy="777240"/>
+            <a:off x="640080" y="457200"/>
+            <a:ext cx="9357055" cy="822960"/>
           </a:xfrm>
           <a:prstGeom prst="rect">
             <a:avLst/>
@@ -3556,11 +3577,11 @@
           <a:p>
             <a:pPr algn="l">
               <a:lnSpc>
-                <a:spcPct val="112000"/>
+                <a:spcPct val="115000"/>
               </a:lnSpc>
             </a:pPr>
             <a:r>
-              <a:rPr sz="2100" b="1" i="0">
+              <a:rPr sz="2000" b="1" i="0">
                 <a:solidFill>
                   <a:srgbClr val="1A1A1A"/>
                 </a:solidFill>
@@ -3568,7 +3589,7 @@
                 <a:ea typeface="SamsungOneKorean"/>
                 <a:cs typeface="SamsungOneKorean"/>
               </a:rPr>
-              <a:t>내부 임원 3인의 증언: 다운사이드는 캐파 반전으로 오고, 계약은 1차 저지선일 뿐이며, 2차 저지선의 기본은 품질이다</a:t>
+              <a:t>내부 임원 3인의 증언: 다운사이드는 캐파 반전으로 오고, 계약은 1차 저지선일 뿐, 2차 저지선의 기본은 품질이다</a:t>
             </a:r>
           </a:p>
         </p:txBody>
@@ -3581,7 +3602,7 @@
         </p:nvSpPr>
         <p:spPr>
           <a:xfrm>
-            <a:off x="10271455" y="411480"/>
+            <a:off x="10180015" y="457200"/>
             <a:ext cx="1371600" cy="182880"/>
           </a:xfrm>
           <a:prstGeom prst="rect">
@@ -3622,8 +3643,8 @@
         </p:nvSpPr>
         <p:spPr>
           <a:xfrm>
-            <a:off x="548640" y="1261872"/>
-            <a:ext cx="11094415" cy="457200"/>
+            <a:off x="640080" y="1298448"/>
+            <a:ext cx="10911535" cy="274320"/>
           </a:xfrm>
           <a:prstGeom prst="rect">
             <a:avLst/>
@@ -3638,11 +3659,11 @@
           <a:p>
             <a:pPr algn="l">
               <a:lnSpc>
-                <a:spcPct val="120000"/>
+                <a:spcPct val="115000"/>
               </a:lnSpc>
             </a:pPr>
             <a:r>
-              <a:rPr sz="1250" b="0" i="0">
+              <a:rPr sz="1100" b="0" i="0">
                 <a:solidFill>
                   <a:srgbClr val="555555"/>
                 </a:solidFill>
@@ -3650,67 +3671,21 @@
                 <a:ea typeface="SamsungOneKorean"/>
                 <a:cs typeface="SamsungOneKorean"/>
               </a:rPr>
-              <a:t>상품기획·영업·AX/PI 관점의 내부 인터뷰 3건(2026-07~09)에서 핵심 발언 1개씩. 발언의 순서가 곧 과제의 스토리라인(문제 정의 → 1차 저지선 → 2차 저지선)이다.</a:t>
-            </a:r>
-          </a:p>
-        </p:txBody>
-      </p:sp>
-      <p:sp>
-        <p:nvSpPr>
-          <p:cNvPr id="5" name="Rounded Rectangle 4"/>
-          <p:cNvSpPr/>
-          <p:nvPr/>
-        </p:nvSpPr>
-        <p:spPr>
-          <a:xfrm>
-            <a:off x="548640" y="1828800"/>
-            <a:ext cx="3527450" cy="3520440"/>
-          </a:xfrm>
-          <a:prstGeom prst="roundRect">
-            <a:avLst>
-              <a:gd name="adj" fmla="val 3000"/>
-            </a:avLst>
-          </a:prstGeom>
-          <a:solidFill>
-            <a:srgbClr val="F6F6F7"/>
-          </a:solidFill>
-          <a:ln>
-            <a:noFill/>
-          </a:ln>
-          <a:effectLst/>
-        </p:spPr>
-        <p:style>
-          <a:lnRef idx="1">
-            <a:schemeClr val="accent1"/>
-          </a:lnRef>
-          <a:fillRef idx="3">
-            <a:schemeClr val="accent1"/>
-          </a:fillRef>
-          <a:effectRef idx="2">
-            <a:schemeClr val="accent1"/>
-          </a:effectRef>
-          <a:fontRef idx="minor">
-            <a:schemeClr val="lt1"/>
-          </a:fontRef>
-        </p:style>
-        <p:txBody>
-          <a:bodyPr rtlCol="0" anchor="ctr"/>
-          <a:lstStyle/>
-          <a:p>
-            <a:pPr algn="ctr"/>
-          </a:p>
-        </p:txBody>
-      </p:sp>
-      <p:sp>
-        <p:nvSpPr>
-          <p:cNvPr id="6" name="TextBox 5"/>
+              <a:t>내부 인터뷰 3건(2026-07~09) · 발언 순서가 곧 과제의 논증 순서: 문제 정의 → 1차 저지선 → 2차 저지선</a:t>
+            </a:r>
+          </a:p>
+        </p:txBody>
+      </p:sp>
+      <p:sp>
+        <p:nvSpPr>
+          <p:cNvPr id="5" name="TextBox 4"/>
           <p:cNvSpPr txBox="1"/>
           <p:nvPr/>
         </p:nvSpPr>
         <p:spPr>
           <a:xfrm>
-            <a:off x="804672" y="2029968"/>
-            <a:ext cx="457200" cy="274320"/>
+            <a:off x="603503" y="1856231"/>
+            <a:ext cx="914400" cy="914400"/>
           </a:xfrm>
           <a:prstGeom prst="rect">
             <a:avLst/>
@@ -3725,11 +3700,11 @@
           <a:p>
             <a:pPr algn="l">
               <a:lnSpc>
-                <a:spcPct val="115000"/>
+                <a:spcPct val="85000"/>
               </a:lnSpc>
             </a:pPr>
             <a:r>
-              <a:rPr sz="1300" b="1" i="0">
+              <a:rPr sz="7200" b="1" i="0">
                 <a:solidFill>
                   <a:srgbClr val="1428A0"/>
                 </a:solidFill>
@@ -3737,21 +3712,21 @@
                 <a:ea typeface="SamsungOneKorean"/>
                 <a:cs typeface="SamsungOneKorean"/>
               </a:rPr>
-              <a:t>01</a:t>
-            </a:r>
-          </a:p>
-        </p:txBody>
-      </p:sp>
-      <p:sp>
-        <p:nvSpPr>
-          <p:cNvPr id="7" name="TextBox 6"/>
+              <a:t>“</a:t>
+            </a:r>
+          </a:p>
+        </p:txBody>
+      </p:sp>
+      <p:sp>
+        <p:nvSpPr>
+          <p:cNvPr id="6" name="TextBox 5"/>
           <p:cNvSpPr txBox="1"/>
           <p:nvPr/>
         </p:nvSpPr>
         <p:spPr>
           <a:xfrm>
-            <a:off x="1261872" y="2057400"/>
-            <a:ext cx="2558186" cy="274320"/>
+            <a:off x="640080" y="2743200"/>
+            <a:ext cx="3301898" cy="2240280"/>
           </a:xfrm>
           <a:prstGeom prst="rect">
             <a:avLst/>
@@ -3766,11 +3741,11 @@
           <a:p>
             <a:pPr algn="l">
               <a:lnSpc>
-                <a:spcPct val="115000"/>
+                <a:spcPct val="132000"/>
               </a:lnSpc>
             </a:pPr>
             <a:r>
-              <a:rPr sz="1200" b="1" i="0">
+              <a:rPr sz="1600" b="1" i="0">
                 <a:solidFill>
                   <a:srgbClr val="1A1A1A"/>
                 </a:solidFill>
@@ -3778,26 +3753,26 @@
                 <a:ea typeface="SamsungOneKorean"/>
                 <a:cs typeface="SamsungOneKorean"/>
               </a:rPr>
-              <a:t>다운사이드의 실체</a:t>
+              <a:t>HBM 하나 만들면 DDR을 4~5개 더 만들 수 있는데 그걸 희생하면서 HBM을 만드는 거다. 디맨드 대비 서플라이가 60~70% 수준인데, HBM이 무너지는 순간 그 갭이 확 줄어들어 쇼티지가 바로 오버서플라이가 될 수 있다.</a:t>
             </a:r>
           </a:p>
         </p:txBody>
       </p:sp>
       <p:cxnSp>
         <p:nvCxnSpPr>
-          <p:cNvPr id="8" name="Connector 7"/>
+          <p:cNvPr id="7" name="Connector 6"/>
           <p:cNvCxnSpPr/>
           <p:nvPr/>
         </p:nvCxnSpPr>
         <p:spPr>
           <a:xfrm>
-            <a:off x="804672" y="2377440"/>
-            <a:ext cx="3015386" cy="0"/>
+            <a:off x="640080" y="5093208"/>
+            <a:ext cx="3301898" cy="0"/>
           </a:xfrm>
           <a:prstGeom prst="line">
             <a:avLst/>
           </a:prstGeom>
-          <a:ln w="6350">
+          <a:ln w="9525">
             <a:solidFill>
               <a:srgbClr val="D9D9D9"/>
             </a:solidFill>
@@ -3821,33 +3796,47 @@
       </p:cxnSp>
       <p:sp>
         <p:nvSpPr>
-          <p:cNvPr id="9" name="TextBox 8"/>
-          <p:cNvSpPr txBox="1"/>
+          <p:cNvPr id="8" name="Oval 7"/>
+          <p:cNvSpPr/>
           <p:nvPr/>
         </p:nvSpPr>
         <p:spPr>
           <a:xfrm>
-            <a:off x="786384" y="2395728"/>
-            <a:ext cx="457200" cy="457200"/>
-          </a:xfrm>
-          <a:prstGeom prst="rect">
+            <a:off x="640080" y="5257800"/>
+            <a:ext cx="420624" cy="420624"/>
+          </a:xfrm>
+          <a:prstGeom prst="ellipse">
             <a:avLst/>
           </a:prstGeom>
-          <a:noFill/>
-        </p:spPr>
-        <p:txBody>
-          <a:bodyPr wrap="square" anchor="t" lIns="0" rIns="0" tIns="0" bIns="0">
-            <a:spAutoFit/>
-          </a:bodyPr>
-          <a:lstStyle/>
-          <a:p>
-            <a:pPr algn="l">
-              <a:lnSpc>
-                <a:spcPct val="90000"/>
-              </a:lnSpc>
-            </a:pPr>
-            <a:r>
-              <a:rPr sz="4000" b="1" i="0">
+          <a:solidFill>
+            <a:srgbClr val="E9EDF8"/>
+          </a:solidFill>
+          <a:ln>
+            <a:noFill/>
+          </a:ln>
+          <a:effectLst/>
+        </p:spPr>
+        <p:style>
+          <a:lnRef idx="1">
+            <a:schemeClr val="accent1"/>
+          </a:lnRef>
+          <a:fillRef idx="3">
+            <a:schemeClr val="accent1"/>
+          </a:fillRef>
+          <a:effectRef idx="2">
+            <a:schemeClr val="accent1"/>
+          </a:effectRef>
+          <a:fontRef idx="minor">
+            <a:schemeClr val="lt1"/>
+          </a:fontRef>
+        </p:style>
+        <p:txBody>
+          <a:bodyPr rtlCol="0" anchor="ctr" lIns="0" rIns="0" tIns="0" bIns="0"/>
+          <a:lstStyle/>
+          <a:p>
+            <a:pPr algn="ctr"/>
+            <a:r>
+              <a:rPr sz="1300" b="1" i="0">
                 <a:solidFill>
                   <a:srgbClr val="1428A0"/>
                 </a:solidFill>
@@ -3855,21 +3844,21 @@
                 <a:ea typeface="SamsungOneKorean"/>
                 <a:cs typeface="SamsungOneKorean"/>
               </a:rPr>
-              <a:t>“</a:t>
-            </a:r>
-          </a:p>
-        </p:txBody>
-      </p:sp>
-      <p:sp>
-        <p:nvSpPr>
-          <p:cNvPr id="10" name="TextBox 9"/>
+              <a:t>최</a:t>
+            </a:r>
+          </a:p>
+        </p:txBody>
+      </p:sp>
+      <p:sp>
+        <p:nvSpPr>
+          <p:cNvPr id="9" name="TextBox 8"/>
           <p:cNvSpPr txBox="1"/>
           <p:nvPr/>
         </p:nvSpPr>
         <p:spPr>
           <a:xfrm>
-            <a:off x="804672" y="2816352"/>
-            <a:ext cx="3015386" cy="1691640"/>
+            <a:off x="1188719" y="5239512"/>
+            <a:ext cx="2753258" cy="256032"/>
           </a:xfrm>
           <a:prstGeom prst="rect">
             <a:avLst/>
@@ -3884,11 +3873,11 @@
           <a:p>
             <a:pPr algn="l">
               <a:lnSpc>
-                <a:spcPct val="128000"/>
+                <a:spcPct val="115000"/>
               </a:lnSpc>
             </a:pPr>
             <a:r>
-              <a:rPr sz="1350" b="1" i="0">
+              <a:rPr sz="1250" b="1" i="0">
                 <a:solidFill>
                   <a:srgbClr val="1A1A1A"/>
                 </a:solidFill>
@@ -3896,7 +3885,48 @@
                 <a:ea typeface="SamsungOneKorean"/>
                 <a:cs typeface="SamsungOneKorean"/>
               </a:rPr>
-              <a:t>HBM 하나 만들면 DDR을 4~5개 더 만들 수 있는데 그걸 희생하면서 HBM을 만드는 거다. 디맨드 대비 서플라이가 60~70% 수준인데, HBM이 무너지는 순간 그 갭이 확 줄어들어 쇼티지가 바로 오버서플라이가 될 수 있다.</a:t>
+              <a:t>최장석 상무</a:t>
+            </a:r>
+          </a:p>
+        </p:txBody>
+      </p:sp>
+      <p:sp>
+        <p:nvSpPr>
+          <p:cNvPr id="10" name="TextBox 9"/>
+          <p:cNvSpPr txBox="1"/>
+          <p:nvPr/>
+        </p:nvSpPr>
+        <p:spPr>
+          <a:xfrm>
+            <a:off x="1188719" y="5504688"/>
+            <a:ext cx="2753258" cy="219456"/>
+          </a:xfrm>
+          <a:prstGeom prst="rect">
+            <a:avLst/>
+          </a:prstGeom>
+          <a:noFill/>
+        </p:spPr>
+        <p:txBody>
+          <a:bodyPr wrap="square" anchor="t" lIns="0" rIns="0" tIns="0" bIns="0">
+            <a:spAutoFit/>
+          </a:bodyPr>
+          <a:lstStyle/>
+          <a:p>
+            <a:pPr algn="l">
+              <a:lnSpc>
+                <a:spcPct val="115000"/>
+              </a:lnSpc>
+            </a:pPr>
+            <a:r>
+              <a:rPr sz="950" b="0" i="0">
+                <a:solidFill>
+                  <a:srgbClr val="555555"/>
+                </a:solidFill>
+                <a:latin typeface="SamsungOneKorean"/>
+                <a:ea typeface="SamsungOneKorean"/>
+                <a:cs typeface="SamsungOneKorean"/>
+              </a:rPr>
+              <a:t>메모리사업부 상품기획팀장</a:t>
             </a:r>
           </a:p>
         </p:txBody>
@@ -3909,8 +3939,8 @@
         </p:nvSpPr>
         <p:spPr>
           <a:xfrm>
-            <a:off x="804672" y="4507992"/>
-            <a:ext cx="3015386" cy="274320"/>
+            <a:off x="1188719" y="5724144"/>
+            <a:ext cx="2753258" cy="219456"/>
           </a:xfrm>
           <a:prstGeom prst="rect">
             <a:avLst/>
@@ -3937,7 +3967,7 @@
                 <a:ea typeface="SamsungOneKorean"/>
                 <a:cs typeface="SamsungOneKorean"/>
               </a:rPr>
-              <a:t>HBM 다운사이드의 실체: 캐파 상쇄 메커니즘</a:t>
+              <a:t>2026-07-29 인터뷰</a:t>
             </a:r>
           </a:p>
         </p:txBody>
@@ -3950,8 +3980,8 @@
         </p:nvCxnSpPr>
         <p:spPr>
           <a:xfrm>
-            <a:off x="804672" y="4818888"/>
-            <a:ext cx="3015386" cy="0"/>
+            <a:off x="4193438" y="2057400"/>
+            <a:ext cx="0" cy="3904488"/>
           </a:xfrm>
           <a:prstGeom prst="line">
             <a:avLst/>
@@ -3986,8 +4016,8 @@
         </p:nvSpPr>
         <p:spPr>
           <a:xfrm>
-            <a:off x="804672" y="4882896"/>
-            <a:ext cx="3015386" cy="237744"/>
+            <a:off x="4408322" y="1856231"/>
+            <a:ext cx="914400" cy="914400"/>
           </a:xfrm>
           <a:prstGeom prst="rect">
             <a:avLst/>
@@ -4002,11 +4032,11 @@
           <a:p>
             <a:pPr algn="l">
               <a:lnSpc>
-                <a:spcPct val="115000"/>
+                <a:spcPct val="85000"/>
               </a:lnSpc>
             </a:pPr>
             <a:r>
-              <a:rPr sz="1200" b="1" i="0">
+              <a:rPr sz="7200" b="1" i="0">
                 <a:solidFill>
                   <a:srgbClr val="1428A0"/>
                 </a:solidFill>
@@ -4014,18 +4044,7 @@
                 <a:ea typeface="SamsungOneKorean"/>
                 <a:cs typeface="SamsungOneKorean"/>
               </a:rPr>
-              <a:t>최장석 상무</a:t>
-            </a:r>
-            <a:r>
-              <a:rPr sz="900" b="0" i="0">
-                <a:solidFill>
-                  <a:srgbClr val="8A8A8E"/>
-                </a:solidFill>
-                <a:latin typeface="SamsungOneKorean"/>
-                <a:ea typeface="SamsungOneKorean"/>
-                <a:cs typeface="SamsungOneKorean"/>
-              </a:rPr>
-              <a:t>   2026-07-29 인터뷰</a:t>
+              <a:t>“</a:t>
             </a:r>
           </a:p>
         </p:txBody>
@@ -4038,8 +4057,8 @@
         </p:nvSpPr>
         <p:spPr>
           <a:xfrm>
-            <a:off x="804672" y="5120640"/>
-            <a:ext cx="3015386" cy="219456"/>
+            <a:off x="4444898" y="2743200"/>
+            <a:ext cx="3301898" cy="2240280"/>
           </a:xfrm>
           <a:prstGeom prst="rect">
             <a:avLst/>
@@ -4054,139 +4073,11 @@
           <a:p>
             <a:pPr algn="l">
               <a:lnSpc>
-                <a:spcPct val="115000"/>
+                <a:spcPct val="132000"/>
               </a:lnSpc>
             </a:pPr>
             <a:r>
-              <a:rPr sz="950" b="0" i="0">
-                <a:solidFill>
-                  <a:srgbClr val="555555"/>
-                </a:solidFill>
-                <a:latin typeface="SamsungOneKorean"/>
-                <a:ea typeface="SamsungOneKorean"/>
-                <a:cs typeface="SamsungOneKorean"/>
-              </a:rPr>
-              <a:t>메모리사업부 상품기획팀장</a:t>
-            </a:r>
-          </a:p>
-        </p:txBody>
-      </p:sp>
-      <p:sp>
-        <p:nvSpPr>
-          <p:cNvPr id="15" name="Rounded Rectangle 14"/>
-          <p:cNvSpPr/>
-          <p:nvPr/>
-        </p:nvSpPr>
-        <p:spPr>
-          <a:xfrm>
-            <a:off x="4332122" y="1828800"/>
-            <a:ext cx="3527450" cy="3520440"/>
-          </a:xfrm>
-          <a:prstGeom prst="roundRect">
-            <a:avLst>
-              <a:gd name="adj" fmla="val 3000"/>
-            </a:avLst>
-          </a:prstGeom>
-          <a:solidFill>
-            <a:srgbClr val="F6F6F7"/>
-          </a:solidFill>
-          <a:ln>
-            <a:noFill/>
-          </a:ln>
-          <a:effectLst/>
-        </p:spPr>
-        <p:style>
-          <a:lnRef idx="1">
-            <a:schemeClr val="accent1"/>
-          </a:lnRef>
-          <a:fillRef idx="3">
-            <a:schemeClr val="accent1"/>
-          </a:fillRef>
-          <a:effectRef idx="2">
-            <a:schemeClr val="accent1"/>
-          </a:effectRef>
-          <a:fontRef idx="minor">
-            <a:schemeClr val="lt1"/>
-          </a:fontRef>
-        </p:style>
-        <p:txBody>
-          <a:bodyPr rtlCol="0" anchor="ctr"/>
-          <a:lstStyle/>
-          <a:p>
-            <a:pPr algn="ctr"/>
-          </a:p>
-        </p:txBody>
-      </p:sp>
-      <p:sp>
-        <p:nvSpPr>
-          <p:cNvPr id="16" name="TextBox 15"/>
-          <p:cNvSpPr txBox="1"/>
-          <p:nvPr/>
-        </p:nvSpPr>
-        <p:spPr>
-          <a:xfrm>
-            <a:off x="4588154" y="2029968"/>
-            <a:ext cx="457200" cy="274320"/>
-          </a:xfrm>
-          <a:prstGeom prst="rect">
-            <a:avLst/>
-          </a:prstGeom>
-          <a:noFill/>
-        </p:spPr>
-        <p:txBody>
-          <a:bodyPr wrap="square" anchor="t" lIns="0" rIns="0" tIns="0" bIns="0">
-            <a:spAutoFit/>
-          </a:bodyPr>
-          <a:lstStyle/>
-          <a:p>
-            <a:pPr algn="l">
-              <a:lnSpc>
-                <a:spcPct val="115000"/>
-              </a:lnSpc>
-            </a:pPr>
-            <a:r>
-              <a:rPr sz="1300" b="1" i="0">
-                <a:solidFill>
-                  <a:srgbClr val="1428A0"/>
-                </a:solidFill>
-                <a:latin typeface="SamsungOneKorean"/>
-                <a:ea typeface="SamsungOneKorean"/>
-                <a:cs typeface="SamsungOneKorean"/>
-              </a:rPr>
-              <a:t>02</a:t>
-            </a:r>
-          </a:p>
-        </p:txBody>
-      </p:sp>
-      <p:sp>
-        <p:nvSpPr>
-          <p:cNvPr id="17" name="TextBox 16"/>
-          <p:cNvSpPr txBox="1"/>
-          <p:nvPr/>
-        </p:nvSpPr>
-        <p:spPr>
-          <a:xfrm>
-            <a:off x="5045354" y="2057400"/>
-            <a:ext cx="2558186" cy="274320"/>
-          </a:xfrm>
-          <a:prstGeom prst="rect">
-            <a:avLst/>
-          </a:prstGeom>
-          <a:noFill/>
-        </p:spPr>
-        <p:txBody>
-          <a:bodyPr wrap="square" anchor="t" lIns="0" rIns="0" tIns="0" bIns="0">
-            <a:spAutoFit/>
-          </a:bodyPr>
-          <a:lstStyle/>
-          <a:p>
-            <a:pPr algn="l">
-              <a:lnSpc>
-                <a:spcPct val="115000"/>
-              </a:lnSpc>
-            </a:pPr>
-            <a:r>
-              <a:rPr sz="1200" b="1" i="0">
+              <a:rPr sz="1600" b="1" i="0">
                 <a:solidFill>
                   <a:srgbClr val="1A1A1A"/>
                 </a:solidFill>
@@ -4194,26 +4085,26 @@
                 <a:ea typeface="SamsungOneKorean"/>
                 <a:cs typeface="SamsungOneKorean"/>
               </a:rPr>
-              <a:t>1차 저지선과 과제의 자리</a:t>
+              <a:t>선수금을 받아놓고 구매 의무를 저버리면 그만큼 차감한다. 메모리 최초의 take-or-pay 바인딩에 NTB 가격 하한까지. 이게 1차 방어선이고, 여러분들의 이 과제가 2차 방어선이다.</a:t>
             </a:r>
           </a:p>
         </p:txBody>
       </p:sp>
       <p:cxnSp>
         <p:nvCxnSpPr>
-          <p:cNvPr id="18" name="Connector 17"/>
+          <p:cNvPr id="15" name="Connector 14"/>
           <p:cNvCxnSpPr/>
           <p:nvPr/>
         </p:nvCxnSpPr>
         <p:spPr>
           <a:xfrm>
-            <a:off x="4588154" y="2377440"/>
-            <a:ext cx="3015386" cy="0"/>
+            <a:off x="4444898" y="5093208"/>
+            <a:ext cx="3301898" cy="0"/>
           </a:xfrm>
           <a:prstGeom prst="line">
             <a:avLst/>
           </a:prstGeom>
-          <a:ln w="6350">
+          <a:ln w="9525">
             <a:solidFill>
               <a:srgbClr val="D9D9D9"/>
             </a:solidFill>
@@ -4237,33 +4128,47 @@
       </p:cxnSp>
       <p:sp>
         <p:nvSpPr>
-          <p:cNvPr id="19" name="TextBox 18"/>
-          <p:cNvSpPr txBox="1"/>
+          <p:cNvPr id="16" name="Oval 15"/>
+          <p:cNvSpPr/>
           <p:nvPr/>
         </p:nvSpPr>
         <p:spPr>
           <a:xfrm>
-            <a:off x="4569866" y="2395728"/>
-            <a:ext cx="457200" cy="457200"/>
-          </a:xfrm>
-          <a:prstGeom prst="rect">
+            <a:off x="4444898" y="5257800"/>
+            <a:ext cx="420624" cy="420624"/>
+          </a:xfrm>
+          <a:prstGeom prst="ellipse">
             <a:avLst/>
           </a:prstGeom>
-          <a:noFill/>
-        </p:spPr>
-        <p:txBody>
-          <a:bodyPr wrap="square" anchor="t" lIns="0" rIns="0" tIns="0" bIns="0">
-            <a:spAutoFit/>
-          </a:bodyPr>
-          <a:lstStyle/>
-          <a:p>
-            <a:pPr algn="l">
-              <a:lnSpc>
-                <a:spcPct val="90000"/>
-              </a:lnSpc>
-            </a:pPr>
-            <a:r>
-              <a:rPr sz="4000" b="1" i="0">
+          <a:solidFill>
+            <a:srgbClr val="E9EDF8"/>
+          </a:solidFill>
+          <a:ln>
+            <a:noFill/>
+          </a:ln>
+          <a:effectLst/>
+        </p:spPr>
+        <p:style>
+          <a:lnRef idx="1">
+            <a:schemeClr val="accent1"/>
+          </a:lnRef>
+          <a:fillRef idx="3">
+            <a:schemeClr val="accent1"/>
+          </a:fillRef>
+          <a:effectRef idx="2">
+            <a:schemeClr val="accent1"/>
+          </a:effectRef>
+          <a:fontRef idx="minor">
+            <a:schemeClr val="lt1"/>
+          </a:fontRef>
+        </p:style>
+        <p:txBody>
+          <a:bodyPr rtlCol="0" anchor="ctr" lIns="0" rIns="0" tIns="0" bIns="0"/>
+          <a:lstStyle/>
+          <a:p>
+            <a:pPr algn="ctr"/>
+            <a:r>
+              <a:rPr sz="1300" b="1" i="0">
                 <a:solidFill>
                   <a:srgbClr val="1428A0"/>
                 </a:solidFill>
@@ -4271,21 +4176,21 @@
                 <a:ea typeface="SamsungOneKorean"/>
                 <a:cs typeface="SamsungOneKorean"/>
               </a:rPr>
-              <a:t>“</a:t>
-            </a:r>
-          </a:p>
-        </p:txBody>
-      </p:sp>
-      <p:sp>
-        <p:nvSpPr>
-          <p:cNvPr id="20" name="TextBox 19"/>
+              <a:t>이</a:t>
+            </a:r>
+          </a:p>
+        </p:txBody>
+      </p:sp>
+      <p:sp>
+        <p:nvSpPr>
+          <p:cNvPr id="17" name="TextBox 16"/>
           <p:cNvSpPr txBox="1"/>
           <p:nvPr/>
         </p:nvSpPr>
         <p:spPr>
           <a:xfrm>
-            <a:off x="4588154" y="2816352"/>
-            <a:ext cx="3015386" cy="1691640"/>
+            <a:off x="4993538" y="5239512"/>
+            <a:ext cx="2753258" cy="256032"/>
           </a:xfrm>
           <a:prstGeom prst="rect">
             <a:avLst/>
@@ -4300,11 +4205,11 @@
           <a:p>
             <a:pPr algn="l">
               <a:lnSpc>
-                <a:spcPct val="128000"/>
+                <a:spcPct val="115000"/>
               </a:lnSpc>
             </a:pPr>
             <a:r>
-              <a:rPr sz="1350" b="1" i="0">
+              <a:rPr sz="1250" b="1" i="0">
                 <a:solidFill>
                   <a:srgbClr val="1A1A1A"/>
                 </a:solidFill>
@@ -4312,21 +4217,62 @@
                 <a:ea typeface="SamsungOneKorean"/>
                 <a:cs typeface="SamsungOneKorean"/>
               </a:rPr>
-              <a:t>선수금을 받아놓고 구매 의무를 저버리면 그만큼 차감한다. 메모리 최초의 take-or-pay 바인딩에 NTB 가격 하한까지. 이게 1차 방어선이고, 여러분들의 이 과제가 2차 방어선이다.</a:t>
-            </a:r>
-          </a:p>
-        </p:txBody>
-      </p:sp>
-      <p:sp>
-        <p:nvSpPr>
-          <p:cNvPr id="21" name="TextBox 20"/>
+              <a:t>이창수 부사장</a:t>
+            </a:r>
+          </a:p>
+        </p:txBody>
+      </p:sp>
+      <p:sp>
+        <p:nvSpPr>
+          <p:cNvPr id="18" name="TextBox 17"/>
           <p:cNvSpPr txBox="1"/>
           <p:nvPr/>
         </p:nvSpPr>
         <p:spPr>
           <a:xfrm>
-            <a:off x="4588154" y="4507992"/>
-            <a:ext cx="3015386" cy="274320"/>
+            <a:off x="4993538" y="5504688"/>
+            <a:ext cx="2753258" cy="219456"/>
+          </a:xfrm>
+          <a:prstGeom prst="rect">
+            <a:avLst/>
+          </a:prstGeom>
+          <a:noFill/>
+        </p:spPr>
+        <p:txBody>
+          <a:bodyPr wrap="square" anchor="t" lIns="0" rIns="0" tIns="0" bIns="0">
+            <a:spAutoFit/>
+          </a:bodyPr>
+          <a:lstStyle/>
+          <a:p>
+            <a:pPr algn="l">
+              <a:lnSpc>
+                <a:spcPct val="115000"/>
+              </a:lnSpc>
+            </a:pPr>
+            <a:r>
+              <a:rPr sz="950" b="0" i="0">
+                <a:solidFill>
+                  <a:srgbClr val="555555"/>
+                </a:solidFill>
+                <a:latin typeface="SamsungOneKorean"/>
+                <a:ea typeface="SamsungOneKorean"/>
+                <a:cs typeface="SamsungOneKorean"/>
+              </a:rPr>
+              <a:t>메모리사업부 영업팀장</a:t>
+            </a:r>
+          </a:p>
+        </p:txBody>
+      </p:sp>
+      <p:sp>
+        <p:nvSpPr>
+          <p:cNvPr id="19" name="TextBox 18"/>
+          <p:cNvSpPr txBox="1"/>
+          <p:nvPr/>
+        </p:nvSpPr>
+        <p:spPr>
+          <a:xfrm>
+            <a:off x="4993538" y="5724144"/>
+            <a:ext cx="2753258" cy="219456"/>
           </a:xfrm>
           <a:prstGeom prst="rect">
             <a:avLst/>
@@ -4353,21 +4299,21 @@
                 <a:ea typeface="SamsungOneKorean"/>
                 <a:cs typeface="SamsungOneKorean"/>
               </a:rPr>
-              <a:t>멀티이어 계약의 구조와 과제의 위치</a:t>
+              <a:t>2026-08-03 인터뷰</a:t>
             </a:r>
           </a:p>
         </p:txBody>
       </p:sp>
       <p:cxnSp>
         <p:nvCxnSpPr>
-          <p:cNvPr id="22" name="Connector 21"/>
+          <p:cNvPr id="20" name="Connector 19"/>
           <p:cNvCxnSpPr/>
           <p:nvPr/>
         </p:nvCxnSpPr>
         <p:spPr>
           <a:xfrm>
-            <a:off x="4588154" y="4818888"/>
-            <a:ext cx="3015386" cy="0"/>
+            <a:off x="7998256" y="2057400"/>
+            <a:ext cx="0" cy="3904488"/>
           </a:xfrm>
           <a:prstGeom prst="line">
             <a:avLst/>
@@ -4396,14 +4342,14 @@
       </p:cxnSp>
       <p:sp>
         <p:nvSpPr>
-          <p:cNvPr id="23" name="TextBox 22"/>
+          <p:cNvPr id="21" name="TextBox 20"/>
           <p:cNvSpPr txBox="1"/>
           <p:nvPr/>
         </p:nvSpPr>
         <p:spPr>
           <a:xfrm>
-            <a:off x="4588154" y="4882896"/>
-            <a:ext cx="3015386" cy="237744"/>
+            <a:off x="8213140" y="1856231"/>
+            <a:ext cx="914400" cy="914400"/>
           </a:xfrm>
           <a:prstGeom prst="rect">
             <a:avLst/>
@@ -4418,11 +4364,11 @@
           <a:p>
             <a:pPr algn="l">
               <a:lnSpc>
-                <a:spcPct val="115000"/>
+                <a:spcPct val="85000"/>
               </a:lnSpc>
             </a:pPr>
             <a:r>
-              <a:rPr sz="1200" b="1" i="0">
+              <a:rPr sz="7200" b="1" i="0">
                 <a:solidFill>
                   <a:srgbClr val="1428A0"/>
                 </a:solidFill>
@@ -4430,32 +4376,21 @@
                 <a:ea typeface="SamsungOneKorean"/>
                 <a:cs typeface="SamsungOneKorean"/>
               </a:rPr>
-              <a:t>이창수 부사장</a:t>
-            </a:r>
-            <a:r>
-              <a:rPr sz="900" b="0" i="0">
-                <a:solidFill>
-                  <a:srgbClr val="8A8A8E"/>
-                </a:solidFill>
-                <a:latin typeface="SamsungOneKorean"/>
-                <a:ea typeface="SamsungOneKorean"/>
-                <a:cs typeface="SamsungOneKorean"/>
-              </a:rPr>
-              <a:t>   2026-08-03 인터뷰</a:t>
-            </a:r>
-          </a:p>
-        </p:txBody>
-      </p:sp>
-      <p:sp>
-        <p:nvSpPr>
-          <p:cNvPr id="24" name="TextBox 23"/>
+              <a:t>“</a:t>
+            </a:r>
+          </a:p>
+        </p:txBody>
+      </p:sp>
+      <p:sp>
+        <p:nvSpPr>
+          <p:cNvPr id="22" name="TextBox 21"/>
           <p:cNvSpPr txBox="1"/>
           <p:nvPr/>
         </p:nvSpPr>
         <p:spPr>
           <a:xfrm>
-            <a:off x="4588154" y="5120640"/>
-            <a:ext cx="3015386" cy="219456"/>
+            <a:off x="8249716" y="2743200"/>
+            <a:ext cx="3301898" cy="2240280"/>
           </a:xfrm>
           <a:prstGeom prst="rect">
             <a:avLst/>
@@ -4470,139 +4405,11 @@
           <a:p>
             <a:pPr algn="l">
               <a:lnSpc>
-                <a:spcPct val="115000"/>
+                <a:spcPct val="132000"/>
               </a:lnSpc>
             </a:pPr>
             <a:r>
-              <a:rPr sz="950" b="0" i="0">
-                <a:solidFill>
-                  <a:srgbClr val="555555"/>
-                </a:solidFill>
-                <a:latin typeface="SamsungOneKorean"/>
-                <a:ea typeface="SamsungOneKorean"/>
-                <a:cs typeface="SamsungOneKorean"/>
-              </a:rPr>
-              <a:t>메모리사업부 영업팀장</a:t>
-            </a:r>
-          </a:p>
-        </p:txBody>
-      </p:sp>
-      <p:sp>
-        <p:nvSpPr>
-          <p:cNvPr id="25" name="Rounded Rectangle 24"/>
-          <p:cNvSpPr/>
-          <p:nvPr/>
-        </p:nvSpPr>
-        <p:spPr>
-          <a:xfrm>
-            <a:off x="8115604" y="1828800"/>
-            <a:ext cx="3527450" cy="3520440"/>
-          </a:xfrm>
-          <a:prstGeom prst="roundRect">
-            <a:avLst>
-              <a:gd name="adj" fmla="val 3000"/>
-            </a:avLst>
-          </a:prstGeom>
-          <a:solidFill>
-            <a:srgbClr val="F6F6F7"/>
-          </a:solidFill>
-          <a:ln>
-            <a:noFill/>
-          </a:ln>
-          <a:effectLst/>
-        </p:spPr>
-        <p:style>
-          <a:lnRef idx="1">
-            <a:schemeClr val="accent1"/>
-          </a:lnRef>
-          <a:fillRef idx="3">
-            <a:schemeClr val="accent1"/>
-          </a:fillRef>
-          <a:effectRef idx="2">
-            <a:schemeClr val="accent1"/>
-          </a:effectRef>
-          <a:fontRef idx="minor">
-            <a:schemeClr val="lt1"/>
-          </a:fontRef>
-        </p:style>
-        <p:txBody>
-          <a:bodyPr rtlCol="0" anchor="ctr"/>
-          <a:lstStyle/>
-          <a:p>
-            <a:pPr algn="ctr"/>
-          </a:p>
-        </p:txBody>
-      </p:sp>
-      <p:sp>
-        <p:nvSpPr>
-          <p:cNvPr id="26" name="TextBox 25"/>
-          <p:cNvSpPr txBox="1"/>
-          <p:nvPr/>
-        </p:nvSpPr>
-        <p:spPr>
-          <a:xfrm>
-            <a:off x="8371636" y="2029968"/>
-            <a:ext cx="457200" cy="274320"/>
-          </a:xfrm>
-          <a:prstGeom prst="rect">
-            <a:avLst/>
-          </a:prstGeom>
-          <a:noFill/>
-        </p:spPr>
-        <p:txBody>
-          <a:bodyPr wrap="square" anchor="t" lIns="0" rIns="0" tIns="0" bIns="0">
-            <a:spAutoFit/>
-          </a:bodyPr>
-          <a:lstStyle/>
-          <a:p>
-            <a:pPr algn="l">
-              <a:lnSpc>
-                <a:spcPct val="115000"/>
-              </a:lnSpc>
-            </a:pPr>
-            <a:r>
-              <a:rPr sz="1300" b="1" i="0">
-                <a:solidFill>
-                  <a:srgbClr val="1428A0"/>
-                </a:solidFill>
-                <a:latin typeface="SamsungOneKorean"/>
-                <a:ea typeface="SamsungOneKorean"/>
-                <a:cs typeface="SamsungOneKorean"/>
-              </a:rPr>
-              <a:t>03</a:t>
-            </a:r>
-          </a:p>
-        </p:txBody>
-      </p:sp>
-      <p:sp>
-        <p:nvSpPr>
-          <p:cNvPr id="27" name="TextBox 26"/>
-          <p:cNvSpPr txBox="1"/>
-          <p:nvPr/>
-        </p:nvSpPr>
-        <p:spPr>
-          <a:xfrm>
-            <a:off x="8828836" y="2057400"/>
-            <a:ext cx="2558186" cy="274320"/>
-          </a:xfrm>
-          <a:prstGeom prst="rect">
-            <a:avLst/>
-          </a:prstGeom>
-          <a:noFill/>
-        </p:spPr>
-        <p:txBody>
-          <a:bodyPr wrap="square" anchor="t" lIns="0" rIns="0" tIns="0" bIns="0">
-            <a:spAutoFit/>
-          </a:bodyPr>
-          <a:lstStyle/>
-          <a:p>
-            <a:pPr algn="l">
-              <a:lnSpc>
-                <a:spcPct val="115000"/>
-              </a:lnSpc>
-            </a:pPr>
-            <a:r>
-              <a:rPr sz="1200" b="1" i="0">
+              <a:rPr sz="1600" b="1" i="0">
                 <a:solidFill>
                   <a:srgbClr val="1A1A1A"/>
                 </a:solidFill>
@@ -4610,26 +4417,26 @@
                 <a:ea typeface="SamsungOneKorean"/>
                 <a:cs typeface="SamsungOneKorean"/>
               </a:rPr>
-              <a:t>2차 저지선의 기본</a:t>
+              <a:t>다음 다운턴이 시작됐다고 가정해 보자. 가격이 빠지고 주문이 슬로우해지고 재고가 쌓이면 무슨 일이 벌어질까. 첫 번째는 대규모 RMA다. 그리고 대규모 RMA가 시작될 때 빌미는 품질이다.</a:t>
             </a:r>
           </a:p>
         </p:txBody>
       </p:sp>
       <p:cxnSp>
         <p:nvCxnSpPr>
-          <p:cNvPr id="28" name="Connector 27"/>
+          <p:cNvPr id="23" name="Connector 22"/>
           <p:cNvCxnSpPr/>
           <p:nvPr/>
         </p:nvCxnSpPr>
         <p:spPr>
           <a:xfrm>
-            <a:off x="8371636" y="2377440"/>
-            <a:ext cx="3015387" cy="0"/>
+            <a:off x="8249716" y="5093208"/>
+            <a:ext cx="3301899" cy="0"/>
           </a:xfrm>
           <a:prstGeom prst="line">
             <a:avLst/>
           </a:prstGeom>
-          <a:ln w="6350">
+          <a:ln w="9525">
             <a:solidFill>
               <a:srgbClr val="D9D9D9"/>
             </a:solidFill>
@@ -4653,33 +4460,47 @@
       </p:cxnSp>
       <p:sp>
         <p:nvSpPr>
-          <p:cNvPr id="29" name="TextBox 28"/>
-          <p:cNvSpPr txBox="1"/>
+          <p:cNvPr id="24" name="Oval 23"/>
+          <p:cNvSpPr/>
           <p:nvPr/>
         </p:nvSpPr>
         <p:spPr>
           <a:xfrm>
-            <a:off x="8353348" y="2395728"/>
-            <a:ext cx="457200" cy="457200"/>
-          </a:xfrm>
-          <a:prstGeom prst="rect">
+            <a:off x="8249716" y="5257800"/>
+            <a:ext cx="420624" cy="420624"/>
+          </a:xfrm>
+          <a:prstGeom prst="ellipse">
             <a:avLst/>
           </a:prstGeom>
-          <a:noFill/>
-        </p:spPr>
-        <p:txBody>
-          <a:bodyPr wrap="square" anchor="t" lIns="0" rIns="0" tIns="0" bIns="0">
-            <a:spAutoFit/>
-          </a:bodyPr>
-          <a:lstStyle/>
-          <a:p>
-            <a:pPr algn="l">
-              <a:lnSpc>
-                <a:spcPct val="90000"/>
-              </a:lnSpc>
-            </a:pPr>
-            <a:r>
-              <a:rPr sz="4000" b="1" i="0">
+          <a:solidFill>
+            <a:srgbClr val="E9EDF8"/>
+          </a:solidFill>
+          <a:ln>
+            <a:noFill/>
+          </a:ln>
+          <a:effectLst/>
+        </p:spPr>
+        <p:style>
+          <a:lnRef idx="1">
+            <a:schemeClr val="accent1"/>
+          </a:lnRef>
+          <a:fillRef idx="3">
+            <a:schemeClr val="accent1"/>
+          </a:fillRef>
+          <a:effectRef idx="2">
+            <a:schemeClr val="accent1"/>
+          </a:effectRef>
+          <a:fontRef idx="minor">
+            <a:schemeClr val="lt1"/>
+          </a:fontRef>
+        </p:style>
+        <p:txBody>
+          <a:bodyPr rtlCol="0" anchor="ctr" lIns="0" rIns="0" tIns="0" bIns="0"/>
+          <a:lstStyle/>
+          <a:p>
+            <a:pPr algn="ctr"/>
+            <a:r>
+              <a:rPr sz="1300" b="1" i="0">
                 <a:solidFill>
                   <a:srgbClr val="1428A0"/>
                 </a:solidFill>
@@ -4687,21 +4508,21 @@
                 <a:ea typeface="SamsungOneKorean"/>
                 <a:cs typeface="SamsungOneKorean"/>
               </a:rPr>
-              <a:t>“</a:t>
-            </a:r>
-          </a:p>
-        </p:txBody>
-      </p:sp>
-      <p:sp>
-        <p:nvSpPr>
-          <p:cNvPr id="30" name="TextBox 29"/>
+              <a:t>송</a:t>
+            </a:r>
+          </a:p>
+        </p:txBody>
+      </p:sp>
+      <p:sp>
+        <p:nvSpPr>
+          <p:cNvPr id="25" name="TextBox 24"/>
           <p:cNvSpPr txBox="1"/>
           <p:nvPr/>
         </p:nvSpPr>
         <p:spPr>
           <a:xfrm>
-            <a:off x="8371636" y="2816352"/>
-            <a:ext cx="3015386" cy="1691640"/>
+            <a:off x="8798356" y="5239512"/>
+            <a:ext cx="2753258" cy="256032"/>
           </a:xfrm>
           <a:prstGeom prst="rect">
             <a:avLst/>
@@ -4716,11 +4537,11 @@
           <a:p>
             <a:pPr algn="l">
               <a:lnSpc>
-                <a:spcPct val="128000"/>
+                <a:spcPct val="115000"/>
               </a:lnSpc>
             </a:pPr>
             <a:r>
-              <a:rPr sz="1350" b="1" i="0">
+              <a:rPr sz="1250" b="1" i="0">
                 <a:solidFill>
                   <a:srgbClr val="1A1A1A"/>
                 </a:solidFill>
@@ -4728,21 +4549,62 @@
                 <a:ea typeface="SamsungOneKorean"/>
                 <a:cs typeface="SamsungOneKorean"/>
               </a:rPr>
-              <a:t>다음 다운턴이 시작됐다고 가정해 보자. 가격이 빠지고 주문이 슬로우해지고 재고가 쌓이면 무슨 일이 벌어질까. 첫 번째는 대규모 RMA다. 그리고 대규모 RMA가 시작될 때 빌미는 품질이다.</a:t>
-            </a:r>
-          </a:p>
-        </p:txBody>
-      </p:sp>
-      <p:sp>
-        <p:nvSpPr>
-          <p:cNvPr id="31" name="TextBox 30"/>
+              <a:t>송용호 부사장</a:t>
+            </a:r>
+          </a:p>
+        </p:txBody>
+      </p:sp>
+      <p:sp>
+        <p:nvSpPr>
+          <p:cNvPr id="26" name="TextBox 25"/>
           <p:cNvSpPr txBox="1"/>
           <p:nvPr/>
         </p:nvSpPr>
         <p:spPr>
           <a:xfrm>
-            <a:off x="8371636" y="4507992"/>
-            <a:ext cx="3015386" cy="274320"/>
+            <a:off x="8798356" y="5504688"/>
+            <a:ext cx="2753258" cy="219456"/>
+          </a:xfrm>
+          <a:prstGeom prst="rect">
+            <a:avLst/>
+          </a:prstGeom>
+          <a:noFill/>
+        </p:spPr>
+        <p:txBody>
+          <a:bodyPr wrap="square" anchor="t" lIns="0" rIns="0" tIns="0" bIns="0">
+            <a:spAutoFit/>
+          </a:bodyPr>
+          <a:lstStyle/>
+          <a:p>
+            <a:pPr algn="l">
+              <a:lnSpc>
+                <a:spcPct val="115000"/>
+              </a:lnSpc>
+            </a:pPr>
+            <a:r>
+              <a:rPr sz="950" b="0" i="0">
+                <a:solidFill>
+                  <a:srgbClr val="555555"/>
+                </a:solidFill>
+                <a:latin typeface="SamsungOneKorean"/>
+                <a:ea typeface="SamsungOneKorean"/>
+                <a:cs typeface="SamsungOneKorean"/>
+              </a:rPr>
+              <a:t>AX/PI센터장 (前 솔루션개발실장)</a:t>
+            </a:r>
+          </a:p>
+        </p:txBody>
+      </p:sp>
+      <p:sp>
+        <p:nvSpPr>
+          <p:cNvPr id="27" name="TextBox 26"/>
+          <p:cNvSpPr txBox="1"/>
+          <p:nvPr/>
+        </p:nvSpPr>
+        <p:spPr>
+          <a:xfrm>
+            <a:off x="8798356" y="5724144"/>
+            <a:ext cx="2753258" cy="219456"/>
           </a:xfrm>
           <a:prstGeom prst="rect">
             <a:avLst/>
@@ -4769,21 +4631,21 @@
                 <a:ea typeface="SamsungOneKorean"/>
                 <a:cs typeface="SamsungOneKorean"/>
               </a:rPr>
-              <a:t>다음 다운턴 시뮬레이션: 과제에 빠져 있던 키워드 "품질"</a:t>
+              <a:t>2026-09-03 인터뷰</a:t>
             </a:r>
           </a:p>
         </p:txBody>
       </p:sp>
       <p:cxnSp>
         <p:nvCxnSpPr>
-          <p:cNvPr id="32" name="Connector 31"/>
+          <p:cNvPr id="28" name="Connector 27"/>
           <p:cNvCxnSpPr/>
           <p:nvPr/>
         </p:nvCxnSpPr>
         <p:spPr>
           <a:xfrm>
-            <a:off x="8371636" y="4818888"/>
-            <a:ext cx="3015387" cy="0"/>
+            <a:off x="640080" y="6291072"/>
+            <a:ext cx="10911535" cy="0"/>
           </a:xfrm>
           <a:prstGeom prst="line">
             <a:avLst/>
@@ -4812,307 +4674,14 @@
       </p:cxnSp>
       <p:sp>
         <p:nvSpPr>
-          <p:cNvPr id="33" name="TextBox 32"/>
+          <p:cNvPr id="29" name="TextBox 28"/>
           <p:cNvSpPr txBox="1"/>
           <p:nvPr/>
         </p:nvSpPr>
         <p:spPr>
           <a:xfrm>
-            <a:off x="8371636" y="4882896"/>
-            <a:ext cx="3015386" cy="237744"/>
-          </a:xfrm>
-          <a:prstGeom prst="rect">
-            <a:avLst/>
-          </a:prstGeom>
-          <a:noFill/>
-        </p:spPr>
-        <p:txBody>
-          <a:bodyPr wrap="square" anchor="t" lIns="0" rIns="0" tIns="0" bIns="0">
-            <a:spAutoFit/>
-          </a:bodyPr>
-          <a:lstStyle/>
-          <a:p>
-            <a:pPr algn="l">
-              <a:lnSpc>
-                <a:spcPct val="115000"/>
-              </a:lnSpc>
-            </a:pPr>
-            <a:r>
-              <a:rPr sz="1200" b="1" i="0">
-                <a:solidFill>
-                  <a:srgbClr val="1428A0"/>
-                </a:solidFill>
-                <a:latin typeface="SamsungOneKorean"/>
-                <a:ea typeface="SamsungOneKorean"/>
-                <a:cs typeface="SamsungOneKorean"/>
-              </a:rPr>
-              <a:t>송용호 부사장</a:t>
-            </a:r>
-            <a:r>
-              <a:rPr sz="900" b="0" i="0">
-                <a:solidFill>
-                  <a:srgbClr val="8A8A8E"/>
-                </a:solidFill>
-                <a:latin typeface="SamsungOneKorean"/>
-                <a:ea typeface="SamsungOneKorean"/>
-                <a:cs typeface="SamsungOneKorean"/>
-              </a:rPr>
-              <a:t>   2026-09-03 인터뷰</a:t>
-            </a:r>
-          </a:p>
-        </p:txBody>
-      </p:sp>
-      <p:sp>
-        <p:nvSpPr>
-          <p:cNvPr id="34" name="TextBox 33"/>
-          <p:cNvSpPr txBox="1"/>
-          <p:nvPr/>
-        </p:nvSpPr>
-        <p:spPr>
-          <a:xfrm>
-            <a:off x="8371636" y="5120640"/>
-            <a:ext cx="3015386" cy="219456"/>
-          </a:xfrm>
-          <a:prstGeom prst="rect">
-            <a:avLst/>
-          </a:prstGeom>
-          <a:noFill/>
-        </p:spPr>
-        <p:txBody>
-          <a:bodyPr wrap="square" anchor="t" lIns="0" rIns="0" tIns="0" bIns="0">
-            <a:spAutoFit/>
-          </a:bodyPr>
-          <a:lstStyle/>
-          <a:p>
-            <a:pPr algn="l">
-              <a:lnSpc>
-                <a:spcPct val="115000"/>
-              </a:lnSpc>
-            </a:pPr>
-            <a:r>
-              <a:rPr sz="950" b="0" i="0">
-                <a:solidFill>
-                  <a:srgbClr val="555555"/>
-                </a:solidFill>
-                <a:latin typeface="SamsungOneKorean"/>
-                <a:ea typeface="SamsungOneKorean"/>
-                <a:cs typeface="SamsungOneKorean"/>
-              </a:rPr>
-              <a:t>AX/PI센터장 (前 솔루션개발실장)</a:t>
-            </a:r>
-          </a:p>
-        </p:txBody>
-      </p:sp>
-      <p:sp>
-        <p:nvSpPr>
-          <p:cNvPr id="35" name="TextBox 34"/>
-          <p:cNvSpPr txBox="1"/>
-          <p:nvPr/>
-        </p:nvSpPr>
-        <p:spPr>
-          <a:xfrm>
-            <a:off x="548640" y="5486400"/>
-            <a:ext cx="1097280" cy="201168"/>
-          </a:xfrm>
-          <a:prstGeom prst="rect">
-            <a:avLst/>
-          </a:prstGeom>
-          <a:noFill/>
-        </p:spPr>
-        <p:txBody>
-          <a:bodyPr wrap="square" anchor="t" lIns="0" rIns="0" tIns="0" bIns="0">
-            <a:spAutoFit/>
-          </a:bodyPr>
-          <a:lstStyle/>
-          <a:p>
-            <a:pPr algn="l">
-              <a:lnSpc>
-                <a:spcPct val="115000"/>
-              </a:lnSpc>
-            </a:pPr>
-            <a:r>
-              <a:rPr sz="950" b="1" i="0">
-                <a:solidFill>
-                  <a:srgbClr val="1428A0"/>
-                </a:solidFill>
-                <a:latin typeface="SamsungOneKorean"/>
-                <a:ea typeface="SamsungOneKorean"/>
-                <a:cs typeface="SamsungOneKorean"/>
-              </a:rPr>
-              <a:t>과제 반영</a:t>
-            </a:r>
-          </a:p>
-        </p:txBody>
-      </p:sp>
-      <p:sp>
-        <p:nvSpPr>
-          <p:cNvPr id="36" name="TextBox 35"/>
-          <p:cNvSpPr txBox="1"/>
-          <p:nvPr/>
-        </p:nvSpPr>
-        <p:spPr>
-          <a:xfrm>
-            <a:off x="804672" y="5687568"/>
-            <a:ext cx="3015386" cy="502920"/>
-          </a:xfrm>
-          <a:prstGeom prst="rect">
-            <a:avLst/>
-          </a:prstGeom>
-          <a:noFill/>
-        </p:spPr>
-        <p:txBody>
-          <a:bodyPr wrap="square" anchor="t" lIns="0" rIns="0" tIns="0" bIns="0">
-            <a:spAutoFit/>
-          </a:bodyPr>
-          <a:lstStyle/>
-          <a:p>
-            <a:pPr algn="l">
-              <a:lnSpc>
-                <a:spcPct val="120000"/>
-              </a:lnSpc>
-            </a:pPr>
-            <a:r>
-              <a:rPr sz="1000" b="0" i="0">
-                <a:solidFill>
-                  <a:srgbClr val="1A1A1A"/>
-                </a:solidFill>
-                <a:latin typeface="SamsungOneKorean"/>
-                <a:ea typeface="SamsungOneKorean"/>
-                <a:cs typeface="SamsungOneKorean"/>
-              </a:rPr>
-              <a:t>"수요 감소"를 가속기 → HBM → DDR의 제품 단위 인과로 정의. 쇼티지가 오버서플라이로 반전되는 지점이 과제의 문제 정의다.</a:t>
-            </a:r>
-          </a:p>
-        </p:txBody>
-      </p:sp>
-      <p:sp>
-        <p:nvSpPr>
-          <p:cNvPr id="37" name="TextBox 36"/>
-          <p:cNvSpPr txBox="1"/>
-          <p:nvPr/>
-        </p:nvSpPr>
-        <p:spPr>
-          <a:xfrm>
-            <a:off x="4588154" y="5687568"/>
-            <a:ext cx="3015386" cy="502920"/>
-          </a:xfrm>
-          <a:prstGeom prst="rect">
-            <a:avLst/>
-          </a:prstGeom>
-          <a:noFill/>
-        </p:spPr>
-        <p:txBody>
-          <a:bodyPr wrap="square" anchor="t" lIns="0" rIns="0" tIns="0" bIns="0">
-            <a:spAutoFit/>
-          </a:bodyPr>
-          <a:lstStyle/>
-          <a:p>
-            <a:pPr algn="l">
-              <a:lnSpc>
-                <a:spcPct val="120000"/>
-              </a:lnSpc>
-            </a:pPr>
-            <a:r>
-              <a:rPr sz="1000" b="0" i="0">
-                <a:solidFill>
-                  <a:srgbClr val="1A1A1A"/>
-                </a:solidFill>
-                <a:latin typeface="SamsungOneKorean"/>
-                <a:ea typeface="SamsungOneKorean"/>
-                <a:cs typeface="SamsungOneKorean"/>
-              </a:rPr>
-              <a:t>계약(LTA·take-or-pay)이 다운턴 물량의 바닥을 만드는 1차 저지선. 계약이 뚫리는 극한 국면을 대비하는 2차 저지선이 이 과제의 정체성이다.</a:t>
-            </a:r>
-          </a:p>
-        </p:txBody>
-      </p:sp>
-      <p:sp>
-        <p:nvSpPr>
-          <p:cNvPr id="38" name="TextBox 37"/>
-          <p:cNvSpPr txBox="1"/>
-          <p:nvPr/>
-        </p:nvSpPr>
-        <p:spPr>
-          <a:xfrm>
-            <a:off x="8371636" y="5687568"/>
-            <a:ext cx="3015386" cy="502920"/>
-          </a:xfrm>
-          <a:prstGeom prst="rect">
-            <a:avLst/>
-          </a:prstGeom>
-          <a:noFill/>
-        </p:spPr>
-        <p:txBody>
-          <a:bodyPr wrap="square" anchor="t" lIns="0" rIns="0" tIns="0" bIns="0">
-            <a:spAutoFit/>
-          </a:bodyPr>
-          <a:lstStyle/>
-          <a:p>
-            <a:pPr algn="l">
-              <a:lnSpc>
-                <a:spcPct val="120000"/>
-              </a:lnSpc>
-            </a:pPr>
-            <a:r>
-              <a:rPr sz="1000" b="0" i="0">
-                <a:solidFill>
-                  <a:srgbClr val="1A1A1A"/>
-                </a:solidFill>
-                <a:latin typeface="SamsungOneKorean"/>
-                <a:ea typeface="SamsungOneKorean"/>
-                <a:cs typeface="SamsungOneKorean"/>
-              </a:rPr>
-              <a:t>고객은 재고 대신 반품으로 대응한다. 새로운 것(전환 TAT·라인 일체화·본딩)에 앞서 품질·원가라는 기본을 2차 저지선의 별도 축으로 세운다.</a:t>
-            </a:r>
-          </a:p>
-        </p:txBody>
-      </p:sp>
-      <p:cxnSp>
-        <p:nvCxnSpPr>
-          <p:cNvPr id="39" name="Connector 38"/>
-          <p:cNvCxnSpPr/>
-          <p:nvPr/>
-        </p:nvCxnSpPr>
-        <p:spPr>
-          <a:xfrm>
-            <a:off x="548640" y="6355080"/>
-            <a:ext cx="11094415" cy="0"/>
-          </a:xfrm>
-          <a:prstGeom prst="line">
-            <a:avLst/>
-          </a:prstGeom>
-          <a:ln w="6350">
-            <a:solidFill>
-              <a:srgbClr val="D9D9D9"/>
-            </a:solidFill>
-          </a:ln>
-          <a:effectLst/>
-        </p:spPr>
-        <p:style>
-          <a:lnRef idx="2">
-            <a:schemeClr val="accent1"/>
-          </a:lnRef>
-          <a:fillRef idx="0">
-            <a:schemeClr val="accent1"/>
-          </a:fillRef>
-          <a:effectRef idx="1">
-            <a:schemeClr val="accent1"/>
-          </a:effectRef>
-          <a:fontRef idx="minor">
-            <a:schemeClr val="tx1"/>
-          </a:fontRef>
-        </p:style>
-      </p:cxnSp>
-      <p:sp>
-        <p:nvSpPr>
-          <p:cNvPr id="40" name="TextBox 39"/>
-          <p:cNvSpPr txBox="1"/>
-          <p:nvPr/>
-        </p:nvSpPr>
-        <p:spPr>
-          <a:xfrm>
-            <a:off x="548640" y="6409944"/>
-            <a:ext cx="10545775" cy="365760"/>
+            <a:off x="640080" y="6355080"/>
+            <a:ext cx="10362895" cy="365760"/>
           </a:xfrm>
           <a:prstGeom prst="rect">
             <a:avLst/>
@@ -5146,13 +4715,13 @@
       </p:sp>
       <p:sp>
         <p:nvSpPr>
-          <p:cNvPr id="41" name="TextBox 40"/>
+          <p:cNvPr id="30" name="TextBox 29"/>
           <p:cNvSpPr txBox="1"/>
           <p:nvPr/>
         </p:nvSpPr>
         <p:spPr>
           <a:xfrm>
-            <a:off x="11185855" y="6409944"/>
+            <a:off x="11094415" y="6355080"/>
             <a:ext cx="457200" cy="182880"/>
           </a:xfrm>
           <a:prstGeom prst="rect">
